--- a/public/templates/quarterly-business-review-template.pptx
+++ b/public/templates/quarterly-business-review-template.pptx
@@ -4247,7 +4247,7 @@
                 <a:ea typeface="Aptos" pitchFamily="34" charset="-122"/>
                 <a:cs typeface="Aptos" pitchFamily="34" charset="-120"/>
               </a:rPr>
-              <a:t>Editable chart placeholder</a:t>
+              <a:t>Editable chart area</a:t>
             </a:r>
             <a:endParaRPr lang="en-US" sz="1000" dirty="0"/>
           </a:p>
@@ -6416,7 +6416,7 @@
                 <a:ea typeface="Aptos" pitchFamily="34" charset="-122"/>
                 <a:cs typeface="Aptos" pitchFamily="34" charset="-120"/>
               </a:rPr>
-              <a:t>Editable chart placeholder</a:t>
+              <a:t>Editable chart area</a:t>
             </a:r>
             <a:endParaRPr lang="en-US" sz="1000" dirty="0"/>
           </a:p>
@@ -8585,7 +8585,7 @@
                 <a:ea typeface="Aptos" pitchFamily="34" charset="-122"/>
                 <a:cs typeface="Aptos" pitchFamily="34" charset="-120"/>
               </a:rPr>
-              <a:t>Editable chart placeholder</a:t>
+              <a:t>Editable chart area</a:t>
             </a:r>
             <a:endParaRPr lang="en-US" sz="1000" dirty="0"/>
           </a:p>
@@ -10754,7 +10754,7 @@
                 <a:ea typeface="Aptos" pitchFamily="34" charset="-122"/>
                 <a:cs typeface="Aptos" pitchFamily="34" charset="-120"/>
               </a:rPr>
-              <a:t>Editable chart placeholder</a:t>
+              <a:t>Editable chart area</a:t>
             </a:r>
             <a:endParaRPr lang="en-US" sz="1000" dirty="0"/>
           </a:p>
@@ -12923,7 +12923,7 @@
                 <a:ea typeface="Aptos" pitchFamily="34" charset="-122"/>
                 <a:cs typeface="Aptos" pitchFamily="34" charset="-120"/>
               </a:rPr>
-              <a:t>Editable chart placeholder</a:t>
+              <a:t>Editable chart area</a:t>
             </a:r>
             <a:endParaRPr lang="en-US" sz="1000" dirty="0"/>
           </a:p>
@@ -15092,7 +15092,7 @@
                 <a:ea typeface="Aptos" pitchFamily="34" charset="-122"/>
                 <a:cs typeface="Aptos" pitchFamily="34" charset="-120"/>
               </a:rPr>
-              <a:t>Editable chart placeholder</a:t>
+              <a:t>Editable chart area</a:t>
             </a:r>
             <a:endParaRPr lang="en-US" sz="1000" dirty="0"/>
           </a:p>
@@ -17261,7 +17261,7 @@
                 <a:ea typeface="Aptos" pitchFamily="34" charset="-122"/>
                 <a:cs typeface="Aptos" pitchFamily="34" charset="-120"/>
               </a:rPr>
-              <a:t>Editable chart placeholder</a:t>
+              <a:t>Editable chart area</a:t>
             </a:r>
             <a:endParaRPr lang="en-US" sz="1000" dirty="0"/>
           </a:p>
@@ -19430,7 +19430,7 @@
                 <a:ea typeface="Aptos" pitchFamily="34" charset="-122"/>
                 <a:cs typeface="Aptos" pitchFamily="34" charset="-120"/>
               </a:rPr>
-              <a:t>Editable chart placeholder</a:t>
+              <a:t>Editable chart area</a:t>
             </a:r>
             <a:endParaRPr lang="en-US" sz="1000" dirty="0"/>
           </a:p>
@@ -21599,7 +21599,7 @@
                 <a:ea typeface="Aptos" pitchFamily="34" charset="-122"/>
                 <a:cs typeface="Aptos" pitchFamily="34" charset="-120"/>
               </a:rPr>
-              <a:t>Editable chart placeholder</a:t>
+              <a:t>Editable chart area</a:t>
             </a:r>
             <a:endParaRPr lang="en-US" sz="1000" dirty="0"/>
           </a:p>

--- a/public/templates/quarterly-business-review-template.pptx
+++ b/public/templates/quarterly-business-review-template.pptx
@@ -1703,7 +1703,7 @@
       </p:sp>
       <p:pic>
         <p:nvPicPr>
-          <p:cNvPr id="3" name="Image 0" descr="/Users/phylsion/Desktop/nam-tools/public/images/branding/logo-full.png">    </p:cNvPr>
+          <p:cNvPr id="3" name="Image 0" descr="APT logo">    </p:cNvPr>
           <p:cNvPicPr>
             <a:picLocks noChangeAspect="1"/>
           </p:cNvPicPr>
@@ -1869,7 +1869,7 @@
       </p:sp>
       <p:pic>
         <p:nvPicPr>
-          <p:cNvPr id="8" name="Image 1" descr="/Users/phylsion/Desktop/nam-tools/public/images/branding/logo-full.png">    </p:cNvPr>
+          <p:cNvPr id="8" name="Image 1" descr="APT logo">    </p:cNvPr>
           <p:cNvPicPr>
             <a:picLocks noChangeAspect="1"/>
           </p:cNvPicPr>
@@ -2021,7 +2021,7 @@
                 <a:ea typeface="Aptos" pitchFamily="34" charset="-122"/>
                 <a:cs typeface="Aptos" pitchFamily="34" charset="-120"/>
               </a:rPr>
-              <a:t>Prepared with editable fictional data for NAM and commercial planning.</a:t>
+              <a:t>Prepared with editable fictional data for account and commercial planning.</a:t>
             </a:r>
             <a:endParaRPr lang="en-US" sz="1300" dirty="0"/>
           </a:p>
@@ -2504,7 +2504,7 @@
       </p:sp>
       <p:pic>
         <p:nvPicPr>
-          <p:cNvPr id="3" name="Image 0" descr="/Users/phylsion/Desktop/nam-tools/public/images/branding/logo-full.png">    </p:cNvPr>
+          <p:cNvPr id="3" name="Image 0" descr="APT logo">    </p:cNvPr>
           <p:cNvPicPr>
             <a:picLocks noChangeAspect="1"/>
           </p:cNvPicPr>
@@ -4673,7 +4673,7 @@
       </p:sp>
       <p:pic>
         <p:nvPicPr>
-          <p:cNvPr id="3" name="Image 0" descr="/Users/phylsion/Desktop/nam-tools/public/images/branding/logo-full.png">    </p:cNvPr>
+          <p:cNvPr id="3" name="Image 0" descr="APT logo">    </p:cNvPr>
           <p:cNvPicPr>
             <a:picLocks noChangeAspect="1"/>
           </p:cNvPicPr>
@@ -6842,7 +6842,7 @@
       </p:sp>
       <p:pic>
         <p:nvPicPr>
-          <p:cNvPr id="3" name="Image 0" descr="/Users/phylsion/Desktop/nam-tools/public/images/branding/logo-full.png">    </p:cNvPr>
+          <p:cNvPr id="3" name="Image 0" descr="APT logo">    </p:cNvPr>
           <p:cNvPicPr>
             <a:picLocks noChangeAspect="1"/>
           </p:cNvPicPr>
@@ -9011,7 +9011,7 @@
       </p:sp>
       <p:pic>
         <p:nvPicPr>
-          <p:cNvPr id="3" name="Image 0" descr="/Users/phylsion/Desktop/nam-tools/public/images/branding/logo-full.png">    </p:cNvPr>
+          <p:cNvPr id="3" name="Image 0" descr="APT logo">    </p:cNvPr>
           <p:cNvPicPr>
             <a:picLocks noChangeAspect="1"/>
           </p:cNvPicPr>
@@ -11180,7 +11180,7 @@
       </p:sp>
       <p:pic>
         <p:nvPicPr>
-          <p:cNvPr id="3" name="Image 0" descr="/Users/phylsion/Desktop/nam-tools/public/images/branding/logo-full.png">    </p:cNvPr>
+          <p:cNvPr id="3" name="Image 0" descr="APT logo">    </p:cNvPr>
           <p:cNvPicPr>
             <a:picLocks noChangeAspect="1"/>
           </p:cNvPicPr>
@@ -13349,7 +13349,7 @@
       </p:sp>
       <p:pic>
         <p:nvPicPr>
-          <p:cNvPr id="3" name="Image 0" descr="/Users/phylsion/Desktop/nam-tools/public/images/branding/logo-full.png">    </p:cNvPr>
+          <p:cNvPr id="3" name="Image 0" descr="APT logo">    </p:cNvPr>
           <p:cNvPicPr>
             <a:picLocks noChangeAspect="1"/>
           </p:cNvPicPr>
@@ -15518,7 +15518,7 @@
       </p:sp>
       <p:pic>
         <p:nvPicPr>
-          <p:cNvPr id="3" name="Image 0" descr="/Users/phylsion/Desktop/nam-tools/public/images/branding/logo-full.png">    </p:cNvPr>
+          <p:cNvPr id="3" name="Image 0" descr="APT logo">    </p:cNvPr>
           <p:cNvPicPr>
             <a:picLocks noChangeAspect="1"/>
           </p:cNvPicPr>
@@ -17687,7 +17687,7 @@
       </p:sp>
       <p:pic>
         <p:nvPicPr>
-          <p:cNvPr id="3" name="Image 0" descr="/Users/phylsion/Desktop/nam-tools/public/images/branding/logo-full.png">    </p:cNvPr>
+          <p:cNvPr id="3" name="Image 0" descr="APT logo">    </p:cNvPr>
           <p:cNvPicPr>
             <a:picLocks noChangeAspect="1"/>
           </p:cNvPicPr>
@@ -19856,7 +19856,7 @@
       </p:sp>
       <p:pic>
         <p:nvPicPr>
-          <p:cNvPr id="3" name="Image 0" descr="/Users/phylsion/Desktop/nam-tools/public/images/branding/logo-full.png">    </p:cNvPr>
+          <p:cNvPr id="3" name="Image 0" descr="APT logo">    </p:cNvPr>
           <p:cNvPicPr>
             <a:picLocks noChangeAspect="1"/>
           </p:cNvPicPr>
